--- a/docs/営業改革_部長会共有資料.pptx
+++ b/docs/営業改革_部長会共有資料.pptx
@@ -3220,7 +3220,7 @@
                 <a:ea typeface="Yu Gothic"/>
                 <a:cs typeface="Yu Gothic"/>
               </a:rPr>
-              <a:t>部長会（経営会議付議前のご相談・30分）</a:t>
+              <a:t>部長会（経営会議に諮る前のご相談・30分）</a:t>
             </a:r>
           </a:p>
         </p:txBody>
@@ -3253,7 +3253,7 @@
               </a:spcAft>
             </a:pPr>
             <a:r>
-              <a:rPr sz="3200" b="1" i="0">
+              <a:rPr sz="3000" b="1" i="0">
                 <a:solidFill>
                   <a:srgbClr val="262630"/>
                 </a:solidFill>
@@ -3261,7 +3261,7 @@
                 <a:ea typeface="Yu Gothic"/>
                 <a:cs typeface="Yu Gothic"/>
               </a:rPr>
-              <a:t>営業改革構想について、皆さんの意見を聞かせてください</a:t>
+              <a:t>営業のやり方を見直したい——皆さんの意見を聞かせてください</a:t>
             </a:r>
           </a:p>
           <a:p>
@@ -3271,7 +3271,7 @@
               </a:spcAft>
             </a:pPr>
             <a:r>
-              <a:rPr sz="1800" b="1" i="0">
+              <a:rPr sz="1700" b="1" i="0">
                 <a:solidFill>
                   <a:srgbClr val="7823DC"/>
                 </a:solidFill>
@@ -3279,7 +3279,7 @@
                 <a:ea typeface="Yu Gothic"/>
                 <a:cs typeface="Yu Gothic"/>
               </a:rPr>
-              <a:t>——円谷IPの収益化能力を再設計する全社改革（案）</a:t>
+              <a:t>——円谷のIPが生み出す収益を、もっと大きくするための全社的な見直し（案）</a:t>
             </a:r>
           </a:p>
           <a:p>
@@ -3297,7 +3297,7 @@
                 <a:ea typeface="Yu Gothic"/>
                 <a:cs typeface="Yu Gothic"/>
               </a:rPr>
-              <a:t>本日の内容はまだ「起案」です。皆さんの現場感で修正した上で、経営会議に付議します</a:t>
+              <a:t>本日の内容はまだ「たたき台」です。皆さんの現場感で直した上で、経営会議に諮ります</a:t>
             </a:r>
           </a:p>
         </p:txBody>
@@ -3356,7 +3356,7 @@
                 <a:ea typeface="Yu Gothic"/>
                 <a:cs typeface="Yu Gothic"/>
               </a:rPr>
-              <a:t>本日30分：構想の説明 18分 ／ 討議 10分 ／ 今後の進め方 2分　※詳細資料は会議後に共有します</a:t>
+              <a:t>本日30分：構想の説明 18分 ／ 意見交換 10分 ／ 今後の進め方 2分　※詳しい資料は会議後にお渡しします</a:t>
             </a:r>
           </a:p>
         </p:txBody>
@@ -3456,7 +3456,7 @@
                 <a:ea typeface="Yu Gothic"/>
                 <a:cs typeface="Yu Gothic"/>
               </a:rPr>
-              <a:t>本日は「決定事項の伝達」ではありません——付議前に、皆さんの知見で構想を鍛えたい</a:t>
+              <a:t>本日は「決まったことの連絡」ではありません——経営会議に諮る前に、皆さんの知恵を借りたい</a:t>
             </a:r>
           </a:p>
         </p:txBody>
@@ -3541,7 +3541,7 @@
                 <a:ea typeface="Yu Gothic"/>
                 <a:cs typeface="Yu Gothic"/>
               </a:rPr>
-              <a:t>経営会議への付議は本日と会議後1週間の意見を反映してから行います。本日決めることはありません</a:t>
+              <a:t>実施するかどうか・予算・人事は経営会議で決めることです。本日この場で決めることはありません</a:t>
             </a:r>
           </a:p>
         </p:txBody>
@@ -3600,7 +3600,7 @@
                 <a:ea typeface="Yu Gothic"/>
                 <a:cs typeface="Yu Gothic"/>
               </a:rPr>
-              <a:t>■ ① 課題仮説の検証：これから示す課題は「仮説」です。現場実感とのズレを教えてください</a:t>
+              <a:t>■ ① これから示す課題は、私の見立て（仮説）です。皆さんの現場の実感と合っているか、ズレているかを教えてください</a:t>
             </a:r>
           </a:p>
           <a:p>
@@ -3618,7 +3618,7 @@
                 <a:ea typeface="Yu Gothic"/>
                 <a:cs typeface="Yu Gothic"/>
               </a:rPr>
-              <a:t>■ ② 実行上の障害の予見：「この設計ではここで詰まる」を、いま指摘してください。始まってから直すより10倍安く済みます</a:t>
+              <a:t>■ ② 「この進め方では、ここで詰まる」という予感があれば、いま指摘してください。始まってから直すより、いま直す方がはるかに安く済みます</a:t>
             </a:r>
           </a:p>
           <a:p>
@@ -3654,7 +3654,7 @@
                 <a:ea typeface="Yu Gothic"/>
                 <a:cs typeface="Yu Gothic"/>
               </a:rPr>
-              <a:t>■ この改革は営業部門の管理強化ではありません。工数の記録は人事評価に一切使いません。目的は、現場の時間を提案・商談・顧客開拓に返すことです</a:t>
+              <a:t>■ この見直しは、営業部門の管理強化ではありません。後ほど「働いた時間の記録」をお願いする話が出てきますが、その記録は人事評価には一切使いません。目的は、現場の時間を奪っている仕事を突き止めて、提案や商談に使える時間を増やすことです</a:t>
             </a:r>
           </a:p>
           <a:p>
@@ -3672,7 +3672,7 @@
                 <a:ea typeface="Yu Gothic"/>
                 <a:cs typeface="Yu Gothic"/>
               </a:rPr>
-              <a:t>※ 実施可否・予算・人事は経営会議マター。本日は構想の中身を良くすることに集中します</a:t>
+              <a:t>※ 30分で収めるため、説明は要点のみ。詳しい資料は会議後にお渡しします</a:t>
             </a:r>
           </a:p>
         </p:txBody>
@@ -3812,7 +3812,7 @@
                 <a:ea typeface="Yu Gothic"/>
                 <a:cs typeface="Yu Gothic"/>
               </a:rPr>
-              <a:t>30分で収めるため説明は要点のみ。詳細は会議後に共有する資料一式で確認いただけます</a:t>
+              <a:t>気になった点は途中でも遠慮なく。最後に10分、まとめて意見交換の時間も取ります</a:t>
             </a:r>
           </a:p>
         </p:txBody>
@@ -3897,7 +3897,7 @@
                 <a:ea typeface="Yu Gothic"/>
                 <a:cs typeface="Yu Gothic"/>
               </a:rPr>
-              <a:t>円谷プロダクション｜営業改革構想 部長会共有資料（経営会議付議前ドラフト・社外秘）</a:t>
+              <a:t>円谷プロダクション｜営業改革構想 部長会共有資料（経営会議に諮る前の相談用・社外秘）</a:t>
             </a:r>
           </a:p>
         </p:txBody>
@@ -4038,7 +4038,7 @@
                 <a:ea typeface="Yu Gothic"/>
                 <a:cs typeface="Yu Gothic"/>
               </a:rPr>
-              <a:t>IPの機会が広がるほど営業の複雑性が増す——4つの構造課題の仮説</a:t>
+              <a:t>ウルトラマンの商売の間口が広がるほど、営業の仕事は複雑になっている——4つの見立て</a:t>
             </a:r>
           </a:p>
         </p:txBody>
@@ -4123,7 +4123,7 @@
                 <a:ea typeface="Yu Gothic"/>
                 <a:cs typeface="Yu Gothic"/>
               </a:rPr>
-              <a:t>海外・カードゲーム・D2C・AI・教育と機会が多面化する一方、営業の仕組みが追いついていない可能性</a:t>
+              <a:t>海外、カードゲーム、自社通販、イベント、AI、教育と機会が増える一方、営業の仕組みが昔のままの可能性</a:t>
             </a:r>
           </a:p>
         </p:txBody>
@@ -4164,7 +4164,7 @@
                 <a:ea typeface="Yu Gothic"/>
                 <a:cs typeface="Yu Gothic"/>
               </a:rPr>
-              <a:t>仮説①　全量が見えない</a:t>
+              <a:t>見立て①　全体像が見えていない</a:t>
             </a:r>
           </a:p>
           <a:p>
@@ -4182,7 +4182,7 @@
                 <a:ea typeface="Yu Gothic"/>
                 <a:cs typeface="Yu Gothic"/>
               </a:rPr>
-              <a:t>■ 案件・顧客・商談・トップ外交・休眠顧客・停滞案件が、担当者の頭の中と個人Excelに分散し、組織として把握できていない</a:t>
+              <a:t>■ いま会社全体で商談がいくつ動いていて、止まっている案件がいくつあるか、誰も正確に答えられない。情報が担当者の頭の中と個人のExcelに散らばっている</a:t>
             </a:r>
           </a:p>
           <a:p>
@@ -4200,7 +4200,7 @@
                 <a:ea typeface="Yu Gothic"/>
                 <a:cs typeface="Yu Gothic"/>
               </a:rPr>
-              <a:t>仮説②　売上偏重の物差し</a:t>
+              <a:t>見立て②　案件を選ぶ物差しが「売上の大きさ」しかない</a:t>
             </a:r>
           </a:p>
           <a:p>
@@ -4218,7 +4218,7 @@
                 <a:ea typeface="Yu Gothic"/>
                 <a:cs typeface="Yu Gothic"/>
               </a:rPr>
-              <a:t>■ 粗利・工数・戦略価値・ブランド価値が評価に乗らず、「断る基準」がないため、消耗する案件も全部背負っている</a:t>
+              <a:t>■ 利益率や手間のかかり方が見えないため、「断る基準」がなく、手間のわりに儲からない案件も全部背負っている</a:t>
             </a:r>
           </a:p>
           <a:p>
@@ -4236,7 +4236,7 @@
                 <a:ea typeface="Yu Gothic"/>
                 <a:cs typeface="Yu Gothic"/>
               </a:rPr>
-              <a:t>仮説③　ボトルネックは営業の外</a:t>
+              <a:t>見立て③　時間を食っているのは商談ではなく、その後ろの工程</a:t>
             </a:r>
           </a:p>
           <a:p>
@@ -4254,7 +4254,7 @@
                 <a:ea typeface="Yu Gothic"/>
                 <a:cs typeface="Yu Gothic"/>
               </a:rPr>
-              <a:t>■ 監修・契約・社内調整がリードタイムの過半を占めている可能性（※監修はIP品質保証の要。緩めるのではなく、リスクに応じた配分に変える）</a:t>
+              <a:t>■ 監修・契約・社内調整に日数の大半がかかっている可能性（※監修はIPの品質を守る要。緩めるのではなく、案件の中身に応じて簡易な進め方と丁寧な進め方を分ける発想）</a:t>
             </a:r>
           </a:p>
           <a:p>
@@ -4272,7 +4272,7 @@
                 <a:ea typeface="Yu Gothic"/>
                 <a:cs typeface="Yu Gothic"/>
               </a:rPr>
-              <a:t>仮説④　決めない会議</a:t>
+              <a:t>見立て④　会議で報告はされるが、物事が決まらない</a:t>
             </a:r>
           </a:p>
           <a:p>
@@ -4290,7 +4290,7 @@
                 <a:ea typeface="Yu Gothic"/>
                 <a:cs typeface="Yu Gothic"/>
               </a:rPr>
-              <a:t>■ 報告で時間が尽き、重点化・停滞打開・撤退・経営支援の判断が行われず、新規領域の案件が大型案件の影に埋もれる</a:t>
+              <a:t>■ 報告で時間が尽き、「どの案件に力を入れるか」「どれをやめるか」「誰を助けるか」が決まらないまま散会している</a:t>
             </a:r>
           </a:p>
           <a:p>
@@ -4308,7 +4308,7 @@
                 <a:ea typeface="Yu Gothic"/>
                 <a:cs typeface="Yu Gothic"/>
               </a:rPr>
-              <a:t>※ これは現場の問題ではなく仕組みの問題。仕組みを直せば増員なしで営業能力を1〜2割拡張できる余地（仮説・90日で実測検証）</a:t>
+              <a:t>※ これは現場の頑張り不足ではなく、仕組みの問題。仕組みを直せば、人を増やさずに営業の力を1〜2割広げられる余地がある（見立て・90日で実際に測って確かめます）</a:t>
             </a:r>
           </a:p>
         </p:txBody>
@@ -4448,7 +4448,7 @@
                 <a:ea typeface="Yu Gothic"/>
                 <a:cs typeface="Yu Gothic"/>
               </a:rPr>
-              <a:t>皆さんの現場実感とのズレ・追加すべき課題を討議で伺います</a:t>
+              <a:t>この4つ、皆さんの現場の実感と合っていますか。ズレや「もっと深刻な問題」があれば後ほど</a:t>
             </a:r>
           </a:p>
         </p:txBody>
@@ -4533,7 +4533,7 @@
                 <a:ea typeface="Yu Gothic"/>
                 <a:cs typeface="Yu Gothic"/>
               </a:rPr>
-              <a:t>円谷プロダクション｜営業改革構想 部長会共有資料（経営会議付議前ドラフト・社外秘）</a:t>
+              <a:t>円谷プロダクション｜営業改革構想 部長会共有資料（経営会議に諮る前の相談用・社外秘）</a:t>
             </a:r>
           </a:p>
         </p:txBody>
@@ -4633,7 +4633,7 @@
                 <a:ea typeface="Yu Gothic"/>
                 <a:cs typeface="Yu Gothic"/>
               </a:rPr>
-              <a:t>改革構想（3分）</a:t>
+              <a:t>見直しの中身（3分）</a:t>
             </a:r>
           </a:p>
         </p:txBody>
@@ -4674,7 +4674,7 @@
                 <a:ea typeface="Yu Gothic"/>
                 <a:cs typeface="Yu Gothic"/>
               </a:rPr>
-              <a:t>ゴール：すべてを可視化し、営業資源を価値が最大化する案件へ再配分する</a:t>
+              <a:t>やることは3段階——「全部見えるようにする」→「物差しで測る」→「決める」</a:t>
             </a:r>
           </a:p>
         </p:txBody>
@@ -4759,7 +4759,7 @@
                 <a:ea typeface="Yu Gothic"/>
                 <a:cs typeface="Yu Gothic"/>
               </a:rPr>
-              <a:t>見える化は手段、再配分が目的。営業を「許諾対応窓口」から「IP収益化プロデューサー」へ</a:t>
+              <a:t>狙い：限られた営業の時間を、最も価値を生む案件・顧客に振り向け直すこと</a:t>
             </a:r>
           </a:p>
         </p:txBody>
@@ -4800,7 +4800,7 @@
                 <a:ea typeface="Yu Gothic"/>
                 <a:cs typeface="Yu Gothic"/>
               </a:rPr>
-              <a:t>基本思想（抜粋・改革の憲法として全社発信予定）</a:t>
+              <a:t>第1段階　全部見えるようにする</a:t>
             </a:r>
           </a:p>
           <a:p>
@@ -4818,7 +4818,7 @@
                 <a:ea typeface="Yu Gothic"/>
                 <a:cs typeface="Yu Gothic"/>
               </a:rPr>
-              <a:t>■ 管理強化ではない／工数把握は監視ではなく時間を取り戻すため／最重要は「やらない案件・省力化する案件・経営支援を入れる案件」を決めること／90日でまず「見えない状態」を終わらせる</a:t>
+              <a:t>■ 顧客・案件・提携先・経営陣の面談から生まれた商談の種・取引が途絶えたお客様——の5つを全部リスト化する。あわせて、営業に関わる時間が何に使われているかを記録する（週15分・90日間だけ）</a:t>
             </a:r>
           </a:p>
           <a:p>
@@ -4836,7 +4836,7 @@
                 <a:ea typeface="Yu Gothic"/>
                 <a:cs typeface="Yu Gothic"/>
               </a:rPr>
-              <a:t>全体構造は3層</a:t>
+              <a:t>第2段階　物差しで測る</a:t>
             </a:r>
           </a:p>
           <a:p>
@@ -4854,7 +4854,25 @@
                 <a:ea typeface="Yu Gothic"/>
                 <a:cs typeface="Yu Gothic"/>
               </a:rPr>
-              <a:t>■ 第1層 見える化：5つの棚卸し（顧客・案件・パートナー・トップ外交・休眠）＋工数把握＋ダッシュボード</a:t>
+              <a:t>■ 案件を「売上・利益・手間・将来性・ファンとのつながり・海外への広がり・ブランドへの影響」の7つの観点で点数化し、顧客も重要度でランク分けする。売上が小さくても将来性のある案件が埋もれない物差しにする</a:t>
+            </a:r>
+          </a:p>
+          <a:p>
+            <a:pPr algn="l">
+              <a:spcAft>
+                <a:spcPts val="300"/>
+              </a:spcAft>
+            </a:pPr>
+            <a:r>
+              <a:rPr sz="1200" b="1" i="0">
+                <a:solidFill>
+                  <a:srgbClr val="3A106E"/>
+                </a:solidFill>
+                <a:latin typeface="Yu Gothic"/>
+                <a:ea typeface="Yu Gothic"/>
+                <a:cs typeface="Yu Gothic"/>
+              </a:rPr>
+              <a:t>第3段階　決める</a:t>
             </a:r>
           </a:p>
           <a:p>
@@ -4872,7 +4890,25 @@
                 <a:ea typeface="Yu Gothic"/>
                 <a:cs typeface="Yu Gothic"/>
               </a:rPr>
-              <a:t>■ 第2層 評価：案件7軸スコアリング（売上・粗利・工数効率・戦略・CRM・海外・ブランド）＋顧客S/A/B/Cランク</a:t>
+              <a:t>■ 会議を「報告の場」から「決める場」に変える。力を入れる案件・止まっている案件の助け方・やめる案件・経営陣が出ていく案件を、データを見ながらその場で決める</a:t>
+            </a:r>
+          </a:p>
+          <a:p>
+            <a:pPr algn="l">
+              <a:spcAft>
+                <a:spcPts val="300"/>
+              </a:spcAft>
+            </a:pPr>
+            <a:r>
+              <a:rPr sz="1200" b="1" i="0">
+                <a:solidFill>
+                  <a:srgbClr val="3A106E"/>
+                </a:solidFill>
+                <a:latin typeface="Yu Gothic"/>
+                <a:ea typeface="Yu Gothic"/>
+                <a:cs typeface="Yu Gothic"/>
+              </a:rPr>
+              <a:t>進め方の方針</a:t>
             </a:r>
           </a:p>
           <a:p>
@@ -4890,25 +4926,7 @@
                 <a:ea typeface="Yu Gothic"/>
                 <a:cs typeface="Yu Gothic"/>
               </a:rPr>
-              <a:t>■ 第3層 意思決定：資料レスの意思決定会議＋撤退・省力化ルール＋トップ外交管理＋経営支援</a:t>
-            </a:r>
-          </a:p>
-          <a:p>
-            <a:pPr algn="l">
-              <a:spcAft>
-                <a:spcPts val="600"/>
-              </a:spcAft>
-            </a:pPr>
-            <a:r>
-              <a:rPr sz="1150" b="0" i="0">
-                <a:solidFill>
-                  <a:srgbClr val="262630"/>
-                </a:solidFill>
-                <a:latin typeface="Yu Gothic"/>
-                <a:ea typeface="Yu Gothic"/>
-                <a:cs typeface="Yu Gothic"/>
-              </a:rPr>
-              <a:t>■ 推進：専任STO（下書き・分析・事務局を巻き取る）／道具はExcelから始めてNotion→SFA/CRMは運用実績を見て判断</a:t>
+              <a:t>■ 専任の推進チームを作り、リスト作りなどの実務はそのチームが巻き取る（現場に丸投げしない）／道具は使い慣れたExcelから始め、効果を確かめてから本格的なシステム投資を判断する</a:t>
             </a:r>
           </a:p>
         </p:txBody>
@@ -5048,7 +5066,7 @@
                 <a:ea typeface="Yu Gothic"/>
                 <a:cs typeface="Yu Gothic"/>
               </a:rPr>
-              <a:t>7軸の評価軸に、領域特有の観点で加えるべき・直すべき点はありますか</a:t>
+              <a:t>案件を測る7つの観点に、皆さんの領域ならではの「これも見るべき」はありますか</a:t>
             </a:r>
           </a:p>
         </p:txBody>
@@ -5133,7 +5151,7 @@
                 <a:ea typeface="Yu Gothic"/>
                 <a:cs typeface="Yu Gothic"/>
               </a:rPr>
-              <a:t>円谷プロダクション｜営業改革構想 部長会共有資料（経営会議付議前ドラフト・社外秘）</a:t>
+              <a:t>円谷プロダクション｜営業改革構想 部長会共有資料（経営会議に諮る前の相談用・社外秘）</a:t>
             </a:r>
           </a:p>
         </p:txBody>
@@ -5233,7 +5251,7 @@
                 <a:ea typeface="Yu Gothic"/>
                 <a:cs typeface="Yu Gothic"/>
               </a:rPr>
-              <a:t>現場を守る設計（3分）</a:t>
+              <a:t>現場への配慮（3分）</a:t>
             </a:r>
           </a:p>
         </p:txBody>
@@ -5274,7 +5292,7 @@
                 <a:ea typeface="Yu Gothic"/>
                 <a:cs typeface="Yu Gothic"/>
               </a:rPr>
-              <a:t>皆さんが最も心配な点に、先に答えます——現場負荷と「詰められ文化」への歯止め</a:t>
+              <a:t>皆さんが一番心配な点に、先に答えます——現場の負担と「詰められるのでは」への歯止め</a:t>
             </a:r>
           </a:p>
         </p:txBody>
@@ -5359,7 +5377,7 @@
                 <a:ea typeface="Yu Gothic"/>
                 <a:cs typeface="Yu Gothic"/>
               </a:rPr>
-              <a:t>この改革は現場が楽になる順番で設計しています。守られない場合は仕組み側を直します</a:t>
+              <a:t>現場が先に楽になる順番で進めます。守られない場合は、直すのは仕組みの側です</a:t>
             </a:r>
           </a:p>
         </p:txBody>
@@ -5400,7 +5418,7 @@
                 <a:ea typeface="Yu Gothic"/>
                 <a:cs typeface="Yu Gothic"/>
               </a:rPr>
-              <a:t>負荷は最小化：棚卸しの下書き8割はSTOが作る</a:t>
+              <a:t>負担は最小限：リスト作りの8割は推進チームがやる</a:t>
             </a:r>
           </a:p>
           <a:p>
@@ -5418,7 +5436,7 @@
                 <a:ea typeface="Yu Gothic"/>
                 <a:cs typeface="Yu Gothic"/>
               </a:rPr>
-              <a:t>■ 現場は確認・修正の2〜3時間のみ。工数メモは週15分・0.5時間単位・精度7割でOK・90日間の時限計測</a:t>
+              <a:t>■ 請求や契約のデータからチームが下書きを作り、現場にお願いするのは確認と手直しの2〜3時間だけ。時間の記録も週15分・30分単位のざっくりで十分（正確さより続くことを優先）</a:t>
             </a:r>
           </a:p>
           <a:p>
@@ -5436,7 +5454,7 @@
                 <a:ea typeface="Yu Gothic"/>
                 <a:cs typeface="Yu Gothic"/>
               </a:rPr>
-              <a:t>評価に使わない：経営陣名義で全社宣言してから開始</a:t>
+              <a:t>評価には使わない：経営陣の名前で全社に宣言してから始める</a:t>
             </a:r>
           </a:p>
           <a:p>
@@ -5454,7 +5472,7 @@
                 <a:ea typeface="Yu Gothic"/>
                 <a:cs typeface="Yu Gothic"/>
               </a:rPr>
-              <a:t>■ 個人明細は本人とSTOのみ閲覧。マネジメントに共有されるのはチーム集計のみ。「なぜこの時間配分だ」と詰めない運用をマネジメント側の約束にする</a:t>
+              <a:t>■ 時間の記録の明細を見られるのは本人と推進チームだけ。上司に渡るのはチーム単位の集計のみ。「なぜこの時間の使い方だ」と個人を詰めないことを、管理職側の約束にします</a:t>
             </a:r>
           </a:p>
           <a:p>
@@ -5472,7 +5490,7 @@
                 <a:ea typeface="Yu Gothic"/>
                 <a:cs typeface="Yu Gothic"/>
               </a:rPr>
-              <a:t>撤退の「言い出しっぺ」を現場にさせない</a:t>
+              <a:t>案件を「やめる」言い出し役を、現場にさせない</a:t>
             </a:r>
           </a:p>
           <a:p>
@@ -5490,7 +5508,7 @@
                 <a:ea typeface="Yu Gothic"/>
                 <a:cs typeface="Yu Gothic"/>
               </a:rPr>
-              <a:t>■ 低収益・高工数案件の撤退・省力化は、データに基づきSTOが起案し、経営が決定の責任を持つ。顧客への伝え方（誠実な説明・代替提案・再開可能性）も会社の標準を用意</a:t>
+              <a:t>■ 手間のわりに儲からない案件をやめる・軽くする判断は、データをもとに推進チームが起案し、経営が決めて経営が責任を持つ。お客様への伝え方（誠実な説明・代わりの提案・再開の可能性）も会社として型を用意する</a:t>
             </a:r>
           </a:p>
           <a:p>
@@ -5508,7 +5526,7 @@
                 <a:ea typeface="Yu Gothic"/>
                 <a:cs typeface="Yu Gothic"/>
               </a:rPr>
-              <a:t>見返りは先に：資料作成禁止・AI提案ドラフト・監修ナレッジ検索</a:t>
+              <a:t>見返りは先に：会議用の資料作りを廃止する</a:t>
             </a:r>
           </a:p>
           <a:p>
@@ -5526,7 +5544,7 @@
                 <a:ea typeface="Yu Gothic"/>
                 <a:cs typeface="Yu Gothic"/>
               </a:rPr>
-              <a:t>■ 報告資料づくりの廃止が現場への最初の返礼。AI・テンプレートで提案作成時間の半減を目指す</a:t>
+              <a:t>■ 報告資料の作成をやめ、会議は一覧データをそのまま映して行う。さらにAIで提案書の下書き作成や過去の監修指摘の検索を助け、作成時間の半減を目指す</a:t>
             </a:r>
           </a:p>
         </p:txBody>
@@ -5666,7 +5684,7 @@
                 <a:ea typeface="Yu Gothic"/>
                 <a:cs typeface="Yu Gothic"/>
               </a:rPr>
-              <a:t>「これでも現場が構える」と思うポイントがあれば教えてください——発信前に直します</a:t>
+              <a:t>「これでも現場は身構える」と思う点があれば教えてください——現場に伝える前に直します</a:t>
             </a:r>
           </a:p>
         </p:txBody>
@@ -5751,7 +5769,7 @@
                 <a:ea typeface="Yu Gothic"/>
                 <a:cs typeface="Yu Gothic"/>
               </a:rPr>
-              <a:t>円谷プロダクション｜営業改革構想 部長会共有資料（経営会議付議前ドラフト・社外秘）</a:t>
+              <a:t>円谷プロダクション｜営業改革構想 部長会共有資料（経営会議に諮る前の相談用・社外秘）</a:t>
             </a:r>
           </a:p>
         </p:txBody>
@@ -5892,7 +5910,7 @@
                 <a:ea typeface="Yu Gothic"/>
                 <a:cs typeface="Yu Gothic"/>
               </a:rPr>
-              <a:t>承認後90日で「見えない状態」を終わらせる——部門への影響はこの範囲</a:t>
+              <a:t>承認されたら、最初の90日で「見えない状態」を終わらせる</a:t>
             </a:r>
           </a:p>
         </p:txBody>
@@ -5977,7 +5995,7 @@
                 <a:ea typeface="Yu Gothic"/>
                 <a:cs typeface="Yu Gothic"/>
               </a:rPr>
-              <a:t>Day 30「全量が見える」→ Day 60「価値と工数で評価できる」→ Day 90「経営が再配分を決定」</a:t>
+              <a:t>30日目「全部見える」→ 60日目「物差しで測れる」→ 90日目「経営がデータを見て決めている」</a:t>
             </a:r>
           </a:p>
         </p:txBody>
@@ -5992,7 +6010,7 @@
         </p:nvGraphicFramePr>
         <p:xfrm>
           <a:off x="502920" y="1901952"/>
-          <a:ext cx="11183111" cy="2267712"/>
+          <a:ext cx="11183110" cy="2414016"/>
         </p:xfrm>
         <a:graphic>
           <a:graphicData uri="http://schemas.openxmlformats.org/drawingml/2006/table">
@@ -6001,11 +6019,11 @@
                 <a:tableStyleId>{5C22544A-7EE6-4342-B048-85BDC9FD1C3A}</a:tableStyleId>
               </a:tblPr>
               <a:tblGrid>
-                <a:gridCol w="1466637"/>
+                <a:gridCol w="1374972"/>
                 <a:gridCol w="5408226"/>
-                <a:gridCol w="4308248"/>
+                <a:gridCol w="4399912"/>
               </a:tblGrid>
-              <a:tr h="566928">
+              <a:tr h="603504">
                 <a:tc>
                   <a:txBody>
                     <a:bodyPr wrap="square"/>
@@ -6025,7 +6043,7 @@
                           <a:ea typeface="Yu Gothic"/>
                           <a:cs typeface="Yu Gothic"/>
                         </a:rPr>
-                        <a:t>フェーズ</a:t>
+                        <a:t>時期</a:t>
                       </a:r>
                     </a:p>
                   </a:txBody>
@@ -6054,7 +6072,7 @@
                           <a:ea typeface="Yu Gothic"/>
                           <a:cs typeface="Yu Gothic"/>
                         </a:rPr>
-                        <a:t>主な動き</a:t>
+                        <a:t>会社側の主な動き</a:t>
                       </a:r>
                     </a:p>
                   </a:txBody>
@@ -6083,7 +6101,7 @@
                           <a:ea typeface="Yu Gothic"/>
                           <a:cs typeface="Yu Gothic"/>
                         </a:rPr>
-                        <a:t>部門への影響（お願いの範囲）</a:t>
+                        <a:t>各部門へのお願い（この範囲だけ）</a:t>
                       </a:r>
                     </a:p>
                   </a:txBody>
@@ -6094,7 +6112,7 @@
                   </a:tcPr>
                 </a:tc>
               </a:tr>
-              <a:tr h="566928">
+              <a:tr h="603504">
                 <a:tc>
                   <a:txBody>
                     <a:bodyPr wrap="square"/>
@@ -6114,7 +6132,7 @@
                           <a:ea typeface="Yu Gothic"/>
                           <a:cs typeface="Yu Gothic"/>
                         </a:rPr>
-                        <a:t>Day 1〜30</a:t>
+                        <a:t>開始〜30日</a:t>
                       </a:r>
                     </a:p>
                   </a:txBody>
@@ -6143,7 +6161,7 @@
                           <a:ea typeface="Yu Gothic"/>
                           <a:cs typeface="Yu Gothic"/>
                         </a:rPr>
-                        <a:t>STO立ち上げ／全社告知・領域別説明会（15分）／5つの棚卸し／工数計測開始／関係者インタビュー</a:t>
+                        <a:t>推進チーム立ち上げ／全社への説明（各領域15分）／5つのリスト作り／時間の記録開始／関係者への聞き取り（20〜30名）</a:t>
                       </a:r>
                     </a:p>
                   </a:txBody>
@@ -6172,7 +6190,7 @@
                           <a:ea typeface="Yu Gothic"/>
                           <a:cs typeface="Yu Gothic"/>
                         </a:rPr>
-                        <a:t>アンバサダー人選／棚卸し確認2〜3時間／週15分の工数メモ開始</a:t>
+                        <a:t>連携窓口役の人選（各領域1名）／リストの確認・手直し（2〜3時間）／週15分の時間記録の開始</a:t>
                       </a:r>
                     </a:p>
                   </a:txBody>
@@ -6183,7 +6201,7 @@
                   </a:tcPr>
                 </a:tc>
               </a:tr>
-              <a:tr h="566928">
+              <a:tr h="603504">
                 <a:tc>
                   <a:txBody>
                     <a:bodyPr wrap="square"/>
@@ -6203,7 +6221,7 @@
                           <a:ea typeface="Yu Gothic"/>
                           <a:cs typeface="Yu Gothic"/>
                         </a:rPr>
-                        <a:t>Day 31〜60</a:t>
+                        <a:t>31〜60日</a:t>
                       </a:r>
                     </a:p>
                   </a:txBody>
@@ -6232,7 +6250,7 @@
                           <a:ea typeface="Yu Gothic"/>
                           <a:cs typeface="Yu Gothic"/>
                         </a:rPr>
-                        <a:t>経営WSで評価軸確定／全案件スコアリング／監修・契約リードタイム実測／ダッシュボードMVP</a:t>
+                        <a:t>経営陣の検討会で採点基準を確定／全案件の点数づけ／監修・契約にかかる日数の実測／案件一覧画面（簡易版）の稼働</a:t>
                       </a:r>
                     </a:p>
                   </a:txBody>
@@ -6261,7 +6279,7 @@
                           <a:ea typeface="Yu Gothic"/>
                           <a:cs typeface="Yu Gothic"/>
                         </a:rPr>
-                        <a:t>領域知見の提供／実測への協力（監修・法務）</a:t>
+                        <a:t>点数づけへの現場知見の提供／日数実測への協力（監修・法務）</a:t>
                       </a:r>
                     </a:p>
                   </a:txBody>
@@ -6272,7 +6290,7 @@
                   </a:tcPr>
                 </a:tc>
               </a:tr>
-              <a:tr h="566928">
+              <a:tr h="603504">
                 <a:tc>
                   <a:txBody>
                     <a:bodyPr wrap="square"/>
@@ -6292,7 +6310,7 @@
                           <a:ea typeface="Yu Gothic"/>
                           <a:cs typeface="Yu Gothic"/>
                         </a:rPr>
-                        <a:t>Day 61〜90</a:t>
+                        <a:t>61〜90日</a:t>
                       </a:r>
                     </a:p>
                   </a:txBody>
@@ -6321,7 +6339,7 @@
                           <a:ea typeface="Yu Gothic"/>
                           <a:cs typeface="Yu Gothic"/>
                         </a:rPr>
-                        <a:t>月次ポートフォリオ会議の実運用（初回撤退判断）／週次会議の資料レス化／休眠顧客再アプローチ／AI PoC</a:t>
+                        <a:t>月例の案件会議を開始（経営出席・最初の「やめる」判断）／週次会議の資料作り廃止／休眠中のお客様への再アプローチ／AI支援のお試し導入</a:t>
                       </a:r>
                     </a:p>
                   </a:txBody>
@@ -6373,8 +6391,8 @@
         </p:nvSpPr>
         <p:spPr>
           <a:xfrm>
-            <a:off x="502920" y="4206240"/>
-            <a:ext cx="11155680" cy="1463040"/>
+            <a:off x="502920" y="4343400"/>
+            <a:ext cx="11155680" cy="1371600"/>
           </a:xfrm>
           <a:prstGeom prst="rect">
             <a:avLst/>
@@ -6401,7 +6419,7 @@
                 <a:ea typeface="Yu Gothic"/>
                 <a:cs typeface="Yu Gothic"/>
               </a:rPr>
-              <a:t>承認された場合、部長の皆さんへの依頼は5つ</a:t>
+              <a:t>承認された場合、部長の皆さんへのお願いは5つ</a:t>
             </a:r>
           </a:p>
           <a:p>
@@ -6419,7 +6437,7 @@
                 <a:ea typeface="Yu Gothic"/>
                 <a:cs typeface="Yu Gothic"/>
               </a:rPr>
-              <a:t>① 領域アンバサダー人選（各領域1名・週2〜3時間想定）　② 自領域の棚卸し品質担保　③ 週次会議の新形式運営　④ メンバー説明会への同席（資料・FAQはSTO準備済み）　⑤ 監修・法務・経営企画：プロセス改革WGへの参画</a:t>
+              <a:t>① 連携窓口役の人選（各領域1名・週2〜3時間の想定）　② 自領域のリストの確認・手直しのやり切り　③ 週次会議の新しい運営（資料なし・データ投影）　④ 現場メンバー向け説明会への同席（説明資料・想定問答は推進チームが用意済み）　⑤ 監修・法務・経営企画の部長：仕事の流れを見直す検討会への参加</a:t>
             </a:r>
           </a:p>
           <a:p>
@@ -6437,7 +6455,7 @@
                 <a:ea typeface="Yu Gothic"/>
                 <a:cs typeface="Yu Gothic"/>
               </a:rPr>
-              <a:t>※ 本日この場でのコミットは求めません。「引き受ける場合の懸念」を先に聞かせてください</a:t>
+              <a:t>※ 本日この場での引き受けの約束は求めません。「引き受けるとしたら、ここが心配」を先に聞かせてください</a:t>
             </a:r>
           </a:p>
         </p:txBody>
@@ -6577,7 +6595,7 @@
                 <a:ea typeface="Yu Gothic"/>
                 <a:cs typeface="Yu Gothic"/>
               </a:rPr>
-              <a:t>5つの依頼のうち「これは難しい・設計を変えてほしい」ものはどれですか</a:t>
+              <a:t>5つのお願いのうち「これは難しい・やり方を変えてほしい」ものはどれですか</a:t>
             </a:r>
           </a:p>
         </p:txBody>
@@ -6662,7 +6680,7 @@
                 <a:ea typeface="Yu Gothic"/>
                 <a:cs typeface="Yu Gothic"/>
               </a:rPr>
-              <a:t>円谷プロダクション｜営業改革構想 部長会共有資料（経営会議付議前ドラフト・社外秘）</a:t>
+              <a:t>円谷プロダクション｜営業改革構想 部長会共有資料（経営会議に諮る前の相談用・社外秘）</a:t>
             </a:r>
           </a:p>
         </p:txBody>
@@ -6762,7 +6780,7 @@
                 <a:ea typeface="Yu Gothic"/>
                 <a:cs typeface="Yu Gothic"/>
               </a:rPr>
-              <a:t>討議（10分）</a:t>
+              <a:t>意見交換（10分）</a:t>
             </a:r>
           </a:p>
         </p:txBody>
@@ -6803,7 +6821,7 @@
                 <a:ea typeface="Yu Gothic"/>
                 <a:cs typeface="Yu Gothic"/>
               </a:rPr>
-              <a:t>2つの論点に絞って伺います——言いそびれた意見は会議後1週間受け付けます</a:t>
+              <a:t>2つの問いに絞って伺います——言いそびれた意見は、会議後1週間受け付けます</a:t>
             </a:r>
           </a:p>
         </p:txBody>
@@ -6888,7 +6906,7 @@
                 <a:ea typeface="Yu Gothic"/>
                 <a:cs typeface="Yu Gothic"/>
               </a:rPr>
-              <a:t>批判・懸念ほど価値があります。ここと会議後1週間で出なかった論点は「合意」とみなして付議します</a:t>
+              <a:t>厳しい指摘ほどありがたい。ここと会議後1週間で出なかった論点は「異論なし」として経営会議に諮ります</a:t>
             </a:r>
           </a:p>
         </p:txBody>
@@ -6903,7 +6921,7 @@
         </p:nvGraphicFramePr>
         <p:xfrm>
           <a:off x="502920" y="1901952"/>
-          <a:ext cx="11183110" cy="1371600"/>
+          <a:ext cx="11183110" cy="1508760"/>
         </p:xfrm>
         <a:graphic>
           <a:graphicData uri="http://schemas.openxmlformats.org/drawingml/2006/table">
@@ -6917,7 +6935,7 @@
                 <a:gridCol w="2892184"/>
                 <a:gridCol w="1156873"/>
               </a:tblGrid>
-              <a:tr h="457200">
+              <a:tr h="502920">
                 <a:tc>
                   <a:txBody>
                     <a:bodyPr wrap="square"/>
@@ -6966,7 +6984,7 @@
                           <a:ea typeface="Yu Gothic"/>
                           <a:cs typeface="Yu Gothic"/>
                         </a:rPr>
-                        <a:t>論点</a:t>
+                        <a:t>問い</a:t>
                       </a:r>
                     </a:p>
                   </a:txBody>
@@ -6995,7 +7013,7 @@
                           <a:ea typeface="Yu Gothic"/>
                           <a:cs typeface="Yu Gothic"/>
                         </a:rPr>
-                        <a:t>特に聞きたい方</a:t>
+                        <a:t>特に伺いたい方</a:t>
                       </a:r>
                     </a:p>
                   </a:txBody>
@@ -7035,7 +7053,7 @@
                   </a:tcPr>
                 </a:tc>
               </a:tr>
-              <a:tr h="457200">
+              <a:tr h="502920">
                 <a:tc>
                   <a:txBody>
                     <a:bodyPr wrap="square"/>
@@ -7084,7 +7102,7 @@
                           <a:ea typeface="Yu Gothic"/>
                           <a:cs typeface="Yu Gothic"/>
                         </a:rPr>
-                        <a:t>課題仮説（4つ）は現場実感と合っているか。ズレ・追加はあるか</a:t>
+                        <a:t>4つの見立て（全体像・物差し・後工程・会議）は、現場の実感と合っているか。ズレや、もっと深刻な問題はあるか</a:t>
                       </a:r>
                     </a:p>
                   </a:txBody>
@@ -7153,7 +7171,7 @@
                   </a:tcPr>
                 </a:tc>
               </a:tr>
-              <a:tr h="457200">
+              <a:tr h="502920">
                 <a:tc>
                   <a:txBody>
                     <a:bodyPr wrap="square"/>
@@ -7202,7 +7220,7 @@
                           <a:ea typeface="Yu Gothic"/>
                           <a:cs typeface="Yu Gothic"/>
                         </a:rPr>
-                        <a:t>実行上の障害はどこか（評価軸／撤退ルール／工数計測／会議の資料レス化／人選）</a:t>
+                        <a:t>進め方のどこで詰まりそうか（案件の採点基準／やめる際のルール／時間の記録／会議の資料作り廃止／人選）</a:t>
                       </a:r>
                     </a:p>
                   </a:txBody>
@@ -7283,8 +7301,8 @@
         </p:nvSpPr>
         <p:spPr>
           <a:xfrm>
-            <a:off x="502920" y="3429000"/>
-            <a:ext cx="11155680" cy="2011680"/>
+            <a:off x="502920" y="3520440"/>
+            <a:ext cx="11155680" cy="1920240"/>
           </a:xfrm>
           <a:prstGeom prst="rect">
             <a:avLst/>
@@ -7311,7 +7329,7 @@
                 <a:ea typeface="Yu Gothic"/>
                 <a:cs typeface="Yu Gothic"/>
               </a:rPr>
-              <a:t>会議後の受付（〜1週間）</a:t>
+              <a:t>会議のあとも受け付けます（〜1週間）</a:t>
             </a:r>
           </a:p>
           <a:p>
@@ -7329,7 +7347,7 @@
                 <a:ea typeface="Yu Gothic"/>
                 <a:cs typeface="Yu Gothic"/>
               </a:rPr>
-              <a:t>■ 宛先：新谷まで直接（メール・口頭可）。監修・契約プロセスの実態、撤退ルールへの懸念、STOリード・アンバサダー人選の推薦は、個別にじっくり伺いたいテーマです</a:t>
+              <a:t>■ 宛先：新谷まで直接（メール・口頭どちらでも）。特に、監修・契約まわりの実情、案件をやめる際の心配ごと、推進チームの責任者や連携窓口役に向く人の推薦は、個別にじっくり伺いたいテーマです</a:t>
             </a:r>
           </a:p>
           <a:p>
@@ -7347,7 +7365,7 @@
                 <a:ea typeface="Yu Gothic"/>
                 <a:cs typeface="Yu Gothic"/>
               </a:rPr>
-              <a:t>■ いただいた意見は「意見 → 構想への反映結果」の一覧にして、付議前に全部長へ共有します。反映しない意見にも理由を返します</a:t>
+              <a:t>■ いただいた意見は「意見 → どう反映したか」の一覧にして、経営会議に諮る前に全部長へお返しします。反映しない意見にも理由を添えます</a:t>
             </a:r>
           </a:p>
         </p:txBody>
@@ -7487,7 +7505,7 @@
                 <a:ea typeface="Yu Gothic"/>
                 <a:cs typeface="Yu Gothic"/>
               </a:rPr>
-              <a:t>残り時間で、まず論点1（課題仮説のズレ）からお願いします</a:t>
+              <a:t>それでは、問い1（4つの見立てのズレ）からお願いします</a:t>
             </a:r>
           </a:p>
         </p:txBody>
@@ -7572,7 +7590,7 @@
                 <a:ea typeface="Yu Gothic"/>
                 <a:cs typeface="Yu Gothic"/>
               </a:rPr>
-              <a:t>円谷プロダクション｜営業改革構想 部長会共有資料（経営会議付議前ドラフト・社外秘）</a:t>
+              <a:t>円谷プロダクション｜営業改革構想 部長会共有資料（経営会議に諮る前の相談用・社外秘）</a:t>
             </a:r>
           </a:p>
         </p:txBody>
@@ -7713,7 +7731,7 @@
                 <a:ea typeface="Yu Gothic"/>
                 <a:cs typeface="Yu Gothic"/>
               </a:rPr>
-              <a:t>本日と1週間の意見を反映し、経営会議に付議します</a:t>
+              <a:t>本日と今後1週間の意見を反映してから、経営会議に諮ります</a:t>
             </a:r>
           </a:p>
         </p:txBody>
@@ -7798,7 +7816,7 @@
                 <a:ea typeface="Yu Gothic"/>
                 <a:cs typeface="Yu Gothic"/>
               </a:rPr>
-              <a:t>承認後はすぐ動ける状態です（実行ツール・現場向け資料は準備済み）</a:t>
+              <a:t>承認されたら、すぐ動ける準備はできています（現場向けの説明資料や管理用のExcel様式は作成済み）</a:t>
             </a:r>
           </a:p>
         </p:txBody>
@@ -7857,7 +7875,7 @@
                 <a:ea typeface="Yu Gothic"/>
                 <a:cs typeface="Yu Gothic"/>
               </a:rPr>
-              <a:t>■ Step 1（本日〜1週間）：意見の受付と反映。「意見→反映結果」を全部長へ共有</a:t>
+              <a:t>■ 手順1（本日〜1週間）：意見の受付と反映。「意見→どう反映したか」を全部長へ共有</a:t>
             </a:r>
           </a:p>
           <a:p>
@@ -7875,7 +7893,7 @@
                 <a:ea typeface="Yu Gothic"/>
                 <a:cs typeface="Yu Gothic"/>
               </a:rPr>
-              <a:t>■ Step 2（〜2週間目安）：経営会議に付議（9つの意思決定。参考スライド参照）</a:t>
+              <a:t>■ 手順2（〜2週間を目安）：経営会議に諮る（承認をお願いする項目は9つ。次のページに一覧）</a:t>
             </a:r>
           </a:p>
           <a:p>
@@ -7893,7 +7911,7 @@
                 <a:ea typeface="Yu Gothic"/>
                 <a:cs typeface="Yu Gothic"/>
               </a:rPr>
-              <a:t>■ Step 3（承認後Day 1〜）：キックオフ。全社告知→領域別説明会→棚卸し開始。皆さんへの正式依頼はこの時点で</a:t>
+              <a:t>■ 手順3（承認後すぐ）：開始。全社への説明 → 各領域15分の現場説明会 → リスト作り開始。皆さんへの正式なお願いはこの時点で行います</a:t>
             </a:r>
           </a:p>
           <a:p>
@@ -7911,7 +7929,7 @@
                 <a:ea typeface="Yu Gothic"/>
                 <a:cs typeface="Yu Gothic"/>
               </a:rPr>
-              <a:t>会議後に共有する資料一式</a:t>
+              <a:t>会議後にお渡しする資料一式</a:t>
             </a:r>
           </a:p>
           <a:p>
@@ -7929,7 +7947,7 @@
                 <a:ea typeface="Yu Gothic"/>
                 <a:cs typeface="Yu Gothic"/>
               </a:rPr>
-              <a:t>■ 経営会議付議資料（全37枚）／現場向け説明会資料（FAQ11問つき）／実行ツール（棚卸しExcel・工数テンプレ・会議運営ツール）／プロジェクト進行プレイブック</a:t>
+              <a:t>■ 経営会議用の資料（全37枚）／現場メンバー向け説明資料（想定問答11問つき）／管理用のExcel様式（案件リスト・時間記録・会議運営）／進め方の手引き</a:t>
             </a:r>
           </a:p>
           <a:p>
@@ -7965,7 +7983,7 @@
                 <a:ea typeface="Yu Gothic"/>
                 <a:cs typeface="Yu Gothic"/>
               </a:rPr>
-              <a:t>この改革は、部長の皆さんが「自分の改革」と思えなければ成功しません。率直な意見をお願いします。——新谷</a:t>
+              <a:t>この見直しは、部長の皆さんが「自分ごと」と思えなければ成功しません。本日の率直な意見に感謝します。——新谷</a:t>
             </a:r>
           </a:p>
         </p:txBody>
@@ -8050,7 +8068,7 @@
                 <a:ea typeface="Yu Gothic"/>
                 <a:cs typeface="Yu Gothic"/>
               </a:rPr>
-              <a:t>円谷プロダクション｜営業改革構想 部長会共有資料（経営会議付議前ドラフト・社外秘）</a:t>
+              <a:t>円谷プロダクション｜営業改革構想 部長会共有資料（経営会議に諮る前の相談用・社外秘）</a:t>
             </a:r>
           </a:p>
         </p:txBody>
@@ -8150,7 +8168,7 @@
                 <a:ea typeface="Yu Gothic"/>
                 <a:cs typeface="Yu Gothic"/>
               </a:rPr>
-              <a:t>（参考・時間があれば）経営会議に付議する9つの意思決定</a:t>
+              <a:t>（参考・時間があれば）経営会議で承認をお願いする9つの項目</a:t>
             </a:r>
           </a:p>
         </p:txBody>
@@ -8191,7 +8209,7 @@
                 <a:ea typeface="Yu Gothic"/>
                 <a:cs typeface="Yu Gothic"/>
               </a:rPr>
-              <a:t>7項目は追加投資ほぼゼロで開始できます</a:t>
+              <a:t>9つのうち7つは、追加のお金をほぼかけずに始められます</a:t>
             </a:r>
           </a:p>
         </p:txBody>
@@ -8250,7 +8268,7 @@
         </p:nvGraphicFramePr>
         <p:xfrm>
           <a:off x="502920" y="1828800"/>
-          <a:ext cx="11183110" cy="3840480"/>
+          <a:ext cx="11183109" cy="4023360"/>
         </p:xfrm>
         <a:graphic>
           <a:graphicData uri="http://schemas.openxmlformats.org/drawingml/2006/table">
@@ -8260,11 +8278,11 @@
               </a:tblPr>
               <a:tblGrid>
                 <a:gridCol w="477910"/>
-                <a:gridCol w="2867464"/>
-                <a:gridCol w="6308422"/>
+                <a:gridCol w="3058628"/>
+                <a:gridCol w="6117257"/>
                 <a:gridCol w="1529314"/>
               </a:tblGrid>
-              <a:tr h="384048">
+              <a:tr h="402336">
                 <a:tc>
                   <a:txBody>
                     <a:bodyPr wrap="square"/>
@@ -8313,7 +8331,7 @@
                           <a:ea typeface="Yu Gothic"/>
                           <a:cs typeface="Yu Gothic"/>
                         </a:rPr>
-                        <a:t>意思決定事項</a:t>
+                        <a:t>承認をお願いする項目</a:t>
                       </a:r>
                     </a:p>
                   </a:txBody>
@@ -8371,7 +8389,7 @@
                           <a:ea typeface="Yu Gothic"/>
                           <a:cs typeface="Yu Gothic"/>
                         </a:rPr>
-                        <a:t>投資規模</a:t>
+                        <a:t>かかる費用</a:t>
                       </a:r>
                     </a:p>
                   </a:txBody>
@@ -8382,7 +8400,7 @@
                   </a:tcPr>
                 </a:tc>
               </a:tr>
-              <a:tr h="384048">
+              <a:tr h="402336">
                 <a:tc>
                   <a:txBody>
                     <a:bodyPr wrap="square"/>
@@ -8431,7 +8449,7 @@
                           <a:ea typeface="Yu Gothic"/>
                           <a:cs typeface="Yu Gothic"/>
                         </a:rPr>
-                        <a:t>STO設置</a:t>
+                        <a:t>専任の推進チームの設置</a:t>
                       </a:r>
                     </a:p>
                   </a:txBody>
@@ -8460,7 +8478,7 @@
                           <a:ea typeface="Yu Gothic"/>
                           <a:cs typeface="Yu Gothic"/>
                         </a:rPr>
-                        <a:t>経営スポンサー（新谷）＋専任リード＋コア2〜3名＋領域アンバサダー</a:t>
+                        <a:t>経営側の責任者（新谷）＋専任の責任者1名＋実務メンバー2〜3名＋各領域の連携窓口役</a:t>
                       </a:r>
                     </a:p>
                   </a:txBody>
@@ -8489,7 +8507,7 @@
                           <a:ea typeface="Yu Gothic"/>
                           <a:cs typeface="Yu Gothic"/>
                         </a:rPr>
-                        <a:t>人員再配置</a:t>
+                        <a:t>人の配置換え</a:t>
                       </a:r>
                     </a:p>
                   </a:txBody>
@@ -8500,7 +8518,7 @@
                   </a:tcPr>
                 </a:tc>
               </a:tr>
-              <a:tr h="384048">
+              <a:tr h="402336">
                 <a:tc>
                   <a:txBody>
                     <a:bodyPr wrap="square"/>
@@ -8549,7 +8567,7 @@
                           <a:ea typeface="Yu Gothic"/>
                           <a:cs typeface="Yu Gothic"/>
                         </a:rPr>
-                        <a:t>営業全量棚卸し</a:t>
+                        <a:t>営業の全量リスト作り</a:t>
                       </a:r>
                     </a:p>
                   </a:txBody>
@@ -8578,7 +8596,7 @@
                           <a:ea typeface="Yu Gothic"/>
                           <a:cs typeface="Yu Gothic"/>
                         </a:rPr>
-                        <a:t>5つの棚卸しの30日以内実施／データアクセス権付与</a:t>
+                        <a:t>顧客・案件・提携先・経営面談の商談の種・休眠顧客の5つを30日でリスト化</a:t>
                       </a:r>
                     </a:p>
                   </a:txBody>
@@ -8618,7 +8636,7 @@
                   </a:tcPr>
                 </a:tc>
               </a:tr>
-              <a:tr h="384048">
+              <a:tr h="402336">
                 <a:tc>
                   <a:txBody>
                     <a:bodyPr wrap="square"/>
@@ -8667,7 +8685,7 @@
                           <a:ea typeface="Yu Gothic"/>
                           <a:cs typeface="Yu Gothic"/>
                         </a:rPr>
-                        <a:t>工数把握の開始</a:t>
+                        <a:t>時間の記録の開始</a:t>
                       </a:r>
                     </a:p>
                   </a:txBody>
@@ -8696,7 +8714,7 @@
                           <a:ea typeface="Yu Gothic"/>
                           <a:cs typeface="Yu Gothic"/>
                         </a:rPr>
-                        <a:t>90日間の時限計測＋「評価に使わない」の経営宣言</a:t>
+                        <a:t>週15分×90日間の期間限定＋「評価に使わない」の経営宣言</a:t>
                       </a:r>
                     </a:p>
                   </a:txBody>
@@ -8736,7 +8754,7 @@
                   </a:tcPr>
                 </a:tc>
               </a:tr>
-              <a:tr h="384048">
+              <a:tr h="402336">
                 <a:tc>
                   <a:txBody>
                     <a:bodyPr wrap="square"/>
@@ -8785,7 +8803,7 @@
                           <a:ea typeface="Yu Gothic"/>
                           <a:cs typeface="Yu Gothic"/>
                         </a:rPr>
-                        <a:t>スコアリング・顧客ランク導入</a:t>
+                        <a:t>案件の点数化と顧客のランク分け</a:t>
                       </a:r>
                     </a:p>
                   </a:txBody>
@@ -8814,7 +8832,7 @@
                           <a:ea typeface="Yu Gothic"/>
                           <a:cs typeface="Yu Gothic"/>
                         </a:rPr>
-                        <a:t>7軸モデル＋経営ワークショップでウェイト確定</a:t>
+                        <a:t>7つの観点の物差しを導入。採点基準は経営陣の検討会で確定</a:t>
                       </a:r>
                     </a:p>
                   </a:txBody>
@@ -8854,7 +8872,7 @@
                   </a:tcPr>
                 </a:tc>
               </a:tr>
-              <a:tr h="384048">
+              <a:tr h="402336">
                 <a:tc>
                   <a:txBody>
                     <a:bodyPr wrap="square"/>
@@ -8903,7 +8921,7 @@
                           <a:ea typeface="Yu Gothic"/>
                           <a:cs typeface="Yu Gothic"/>
                         </a:rPr>
-                        <a:t>撤退・省力化判断ルール</a:t>
+                        <a:t>案件を「やめる・軽くする」際のルール</a:t>
                       </a:r>
                     </a:p>
                   </a:txBody>
@@ -8932,7 +8950,7 @@
                           <a:ea typeface="Yu Gothic"/>
                           <a:cs typeface="Yu Gothic"/>
                         </a:rPr>
-                        <a:t>トリアージ3分類／判断責任は月次会議（経営）</a:t>
+                        <a:t>仕分けの基準を定め、判断の責任は経営が持つ</a:t>
                       </a:r>
                     </a:p>
                   </a:txBody>
@@ -8972,7 +8990,7 @@
                   </a:tcPr>
                 </a:tc>
               </a:tr>
-              <a:tr h="384048">
+              <a:tr h="402336">
                 <a:tc>
                   <a:txBody>
                     <a:bodyPr wrap="square"/>
@@ -9021,7 +9039,7 @@
                           <a:ea typeface="Yu Gothic"/>
                           <a:cs typeface="Yu Gothic"/>
                         </a:rPr>
-                        <a:t>重点顧客・案件への経営支援</a:t>
+                        <a:t>重要な顧客・案件への経営陣の応援</a:t>
                       </a:r>
                     </a:p>
                   </a:txBody>
@@ -9050,7 +9068,7 @@
                           <a:ea typeface="Yu Gothic"/>
                           <a:cs typeface="Yu Gothic"/>
                         </a:rPr>
-                        <a:t>Sランク顧客の経営スポンサー制／トップ外交48時間登録</a:t>
+                        <a:t>最重要顧客は役員が担当を持つ／経営面談の商談の種は48時間以内に推進チームへ共有</a:t>
                       </a:r>
                     </a:p>
                   </a:txBody>
@@ -9079,7 +9097,7 @@
                           <a:ea typeface="Yu Gothic"/>
                           <a:cs typeface="Yu Gothic"/>
                         </a:rPr>
-                        <a:t>経営の時間</a:t>
+                        <a:t>経営陣の時間</a:t>
                       </a:r>
                     </a:p>
                   </a:txBody>
@@ -9090,7 +9108,7 @@
                   </a:tcPr>
                 </a:tc>
               </a:tr>
-              <a:tr h="384048">
+              <a:tr h="402336">
                 <a:tc>
                   <a:txBody>
                     <a:bodyPr wrap="square"/>
@@ -9139,7 +9157,7 @@
                           <a:ea typeface="Yu Gothic"/>
                           <a:cs typeface="Yu Gothic"/>
                         </a:rPr>
-                        <a:t>監修・契約プロセス改革</a:t>
+                        <a:t>監修・契約の仕事の流れの見直し</a:t>
                       </a:r>
                     </a:p>
                   </a:txBody>
@@ -9168,7 +9186,7 @@
                           <a:ea typeface="Yu Gothic"/>
                           <a:cs typeface="Yu Gothic"/>
                         </a:rPr>
-                        <a:t>WG設置（営業＋監修＋法務＋STO）／リードタイム実測</a:t>
+                        <a:t>検討会の設置（営業＋監修＋法務）／かかる日数の実測から着手</a:t>
                       </a:r>
                     </a:p>
                   </a:txBody>
@@ -9208,7 +9226,7 @@
                   </a:tcPr>
                 </a:tc>
               </a:tr>
-              <a:tr h="384048">
+              <a:tr h="402336">
                 <a:tc>
                   <a:txBody>
                     <a:bodyPr wrap="square"/>
@@ -9257,7 +9275,7 @@
                           <a:ea typeface="Yu Gothic"/>
                           <a:cs typeface="Yu Gothic"/>
                         </a:rPr>
-                        <a:t>AI営業支援PoC</a:t>
+                        <a:t>AI支援のお試し導入</a:t>
                       </a:r>
                     </a:p>
                   </a:txBody>
@@ -9286,7 +9304,7 @@
                           <a:ea typeface="Yu Gothic"/>
                           <a:cs typeface="Yu Gothic"/>
                         </a:rPr>
-                        <a:t>提案初稿生成・監修ナレッジ検索の2件から</a:t>
+                        <a:t>提案書の下書き作成・過去の監修指摘の検索の2つから</a:t>
                       </a:r>
                     </a:p>
                   </a:txBody>
@@ -9326,7 +9344,7 @@
                   </a:tcPr>
                 </a:tc>
               </a:tr>
-              <a:tr h="384048">
+              <a:tr h="402336">
                 <a:tc>
                   <a:txBody>
                     <a:bodyPr wrap="square"/>
@@ -9375,7 +9393,7 @@
                           <a:ea typeface="Yu Gothic"/>
                           <a:cs typeface="Yu Gothic"/>
                         </a:rPr>
-                        <a:t>ダッシュボードMVP構築</a:t>
+                        <a:t>案件一覧画面（簡易版）の構築</a:t>
                       </a:r>
                     </a:p>
                   </a:txBody>
@@ -9404,7 +9422,7 @@
                           <a:ea typeface="Yu Gothic"/>
                           <a:cs typeface="Yu Gothic"/>
                         </a:rPr>
-                        <a:t>既存ツールで構築／大規模投資はMonth 6に判断</a:t>
+                        <a:t>まずExcelなど手元の道具で構築。本格的なシステム投資は6か月目に判断</a:t>
                       </a:r>
                     </a:p>
                   </a:txBody>
@@ -9528,7 +9546,7 @@
                 <a:ea typeface="Yu Gothic"/>
                 <a:cs typeface="Yu Gothic"/>
               </a:rPr>
-              <a:t>円谷プロダクション｜営業改革構想 部長会共有資料（経営会議付議前ドラフト・社外秘）</a:t>
+              <a:t>円谷プロダクション｜営業改革構想 部長会共有資料（経営会議に諮る前の相談用・社外秘）</a:t>
             </a:r>
           </a:p>
         </p:txBody>

--- a/docs/営業改革_部長会共有資料.pptx
+++ b/docs/営業改革_部長会共有資料.pptx
@@ -3253,7 +3253,7 @@
               </a:spcAft>
             </a:pPr>
             <a:r>
-              <a:rPr sz="3000" b="1" i="0">
+              <a:rPr sz="2700" b="1" i="0">
                 <a:solidFill>
                   <a:srgbClr val="262630"/>
                 </a:solidFill>
